--- a/docs/HackSummit-PACT.pptx
+++ b/docs/HackSummit-PACT.pptx
@@ -3399,7 +3399,7 @@
                 </a:solidFill>
                 <a:latin typeface="Arial"/>
               </a:rPr>
-              <a:t>190 + 55 tests, green on every push</a:t>
+              <a:t>194 + 55 tests, green on every push</a:t>
             </a:r>
           </a:p>
         </p:txBody>
@@ -5789,7 +5789,7 @@
                 </a:solidFill>
                 <a:latin typeface="Arial"/>
               </a:rPr>
-              <a:t>190 Python tests, 55 console tests, and the six demo beats run against the image itself on every push.</a:t>
+              <a:t>194 Python tests, 55 console tests, and the six demo beats run against the image itself on every push.</a:t>
             </a:r>
           </a:p>
         </p:txBody>
@@ -8517,7 +8517,7 @@
                 </a:solidFill>
                 <a:latin typeface="Arial"/>
               </a:rPr>
-              <a:t>Three lanes, one repository, 84 commits on main — backend, evidence and interfaces, each with its own directory and its own tests.</a:t>
+              <a:t>Three lanes, one repository, 86 commits on main — backend, evidence and interfaces, each with its own directory and its own tests.</a:t>
             </a:r>
           </a:p>
         </p:txBody>

--- a/docs/HackSummit-PACT.pptx
+++ b/docs/HackSummit-PACT.pptx
@@ -3399,7 +3399,7 @@
                 </a:solidFill>
                 <a:latin typeface="Arial"/>
               </a:rPr>
-              <a:t>194 + 55 tests, green on every push</a:t>
+              <a:t>195 + 55 tests, green on every push</a:t>
             </a:r>
           </a:p>
         </p:txBody>
@@ -5789,7 +5789,7 @@
                 </a:solidFill>
                 <a:latin typeface="Arial"/>
               </a:rPr>
-              <a:t>194 Python tests, 55 console tests, and the six demo beats run against the image itself on every push.</a:t>
+              <a:t>195 Python tests, 55 console tests, and the six demo beats run against the image itself on every push.</a:t>
             </a:r>
           </a:p>
         </p:txBody>
@@ -7953,7 +7953,7 @@
                 <a:latin typeface="Arial"/>
               </a:rPr>
               <a:t>for the gate to reach ALLOW
-across its nine checks</a:t>
+across its ten checks</a:t>
             </a:r>
           </a:p>
         </p:txBody>
@@ -8517,7 +8517,7 @@
                 </a:solidFill>
                 <a:latin typeface="Arial"/>
               </a:rPr>
-              <a:t>Three lanes, one repository, 86 commits on main — backend, evidence and interfaces, each with its own directory and its own tests.</a:t>
+              <a:t>Three lanes, one repository, 88 commits on main — backend, evidence and interfaces, each with its own directory and its own tests.</a:t>
             </a:r>
           </a:p>
         </p:txBody>
@@ -8680,7 +8680,7 @@
                 </a:solidFill>
                 <a:latin typeface="Arial"/>
               </a:rPr>
-              <a:t>The gate and its nine checks, the reservation ledger, the quote engine, the rollback saga and the settlement rails.</a:t>
+              <a:t>The gate and its ten checks, the reservation ledger, the quote engine, the rollback saga and the settlement rails.</a:t>
             </a:r>
           </a:p>
         </p:txBody>

--- a/docs/HackSummit-PACT.pptx
+++ b/docs/HackSummit-PACT.pptx
@@ -3399,7 +3399,7 @@
                 </a:solidFill>
                 <a:latin typeface="Arial"/>
               </a:rPr>
-              <a:t>195 + 55 tests, green on every push</a:t>
+              <a:t>196 + 55 tests, green on every push</a:t>
             </a:r>
           </a:p>
         </p:txBody>
@@ -5789,7 +5789,7 @@
                 </a:solidFill>
                 <a:latin typeface="Arial"/>
               </a:rPr>
-              <a:t>195 Python tests, 55 console tests, and the six demo beats run against the image itself on every push.</a:t>
+              <a:t>196 Python tests, 55 console tests, and the six demo beats run against the image itself on every push.</a:t>
             </a:r>
           </a:p>
         </p:txBody>
@@ -8517,7 +8517,7 @@
                 </a:solidFill>
                 <a:latin typeface="Arial"/>
               </a:rPr>
-              <a:t>Three lanes, one repository, 88 commits on main — backend, evidence and interfaces, each with its own directory and its own tests.</a:t>
+              <a:t>Three lanes, one repository, 94 commits on main — backend, evidence and interfaces, each with its own directory and its own tests.</a:t>
             </a:r>
           </a:p>
         </p:txBody>

--- a/docs/HackSummit-PACT.pptx
+++ b/docs/HackSummit-PACT.pptx
@@ -3399,7 +3399,7 @@
                 </a:solidFill>
                 <a:latin typeface="Arial"/>
               </a:rPr>
-              <a:t>196 + 55 tests, green on every push</a:t>
+              <a:t>197 + 55 tests, green on every push</a:t>
             </a:r>
           </a:p>
         </p:txBody>
@@ -5789,7 +5789,7 @@
                 </a:solidFill>
                 <a:latin typeface="Arial"/>
               </a:rPr>
-              <a:t>196 Python tests, 55 console tests, and the six demo beats run against the image itself on every push.</a:t>
+              <a:t>197 Python tests, 55 console tests, and the six demo beats run against the image itself on every push.</a:t>
             </a:r>
           </a:p>
         </p:txBody>
@@ -8517,7 +8517,7 @@
                 </a:solidFill>
                 <a:latin typeface="Arial"/>
               </a:rPr>
-              <a:t>Three lanes, one repository, 94 commits on main — backend, evidence and interfaces, each with its own directory and its own tests.</a:t>
+              <a:t>Three lanes, one repository, 103 commits on main — backend, evidence and interfaces, each with its own directory and its own tests.</a:t>
             </a:r>
           </a:p>
         </p:txBody>

--- a/docs/HackSummit-PACT.pptx
+++ b/docs/HackSummit-PACT.pptx
@@ -3193,7 +3193,7 @@
                 <a:cs typeface="Arimo Bold"/>
                 <a:sym typeface="Arimo Bold"/>
               </a:rPr>
-              <a:t>TEAM NAME -</a:t>
+              <a:t>TEAM NAME - </a:t>
             </a:r>
           </a:p>
         </p:txBody>
@@ -3275,7 +3275,7 @@
                 <a:cs typeface="Arimo Bold"/>
                 <a:sym typeface="Arimo Bold"/>
               </a:rPr>
-              <a:t>TRACK - </a:t>
+              <a:t>TRACK - AI Growth &amp; Agentic Commerce, Razorpay</a:t>
             </a:r>
           </a:p>
         </p:txBody>
@@ -3399,7 +3399,7 @@
                 </a:solidFill>
                 <a:latin typeface="Arial"/>
               </a:rPr>
-              <a:t>197 + 55 tests, green on every push</a:t>
+              <a:t>198 + 55 tests, green on every push</a:t>
             </a:r>
           </a:p>
         </p:txBody>
@@ -5789,7 +5789,7 @@
                 </a:solidFill>
                 <a:latin typeface="Arial"/>
               </a:rPr>
-              <a:t>197 Python tests, 55 console tests, and the six demo beats run against the image itself on every push.</a:t>
+              <a:t>198 Python tests, 55 console tests, and the six demo beats run against the image itself on every push.</a:t>
             </a:r>
           </a:p>
         </p:txBody>
@@ -8517,7 +8517,7 @@
                 </a:solidFill>
                 <a:latin typeface="Arial"/>
               </a:rPr>
-              <a:t>Three lanes, one repository, 103 commits on main — backend, evidence and interfaces, each with its own directory and its own tests.</a:t>
+              <a:t>Three lanes, one repository, 104 commits on main — backend, evidence and interfaces, each with its own directory and its own tests.</a:t>
             </a:r>
           </a:p>
         </p:txBody>
@@ -8719,7 +8719,7 @@
                 </a:solidFill>
                 <a:latin typeface="Arial"/>
               </a:rPr>
-              <a:t>NAME</a:t>
+              <a:t>SWETANK</a:t>
             </a:r>
           </a:p>
         </p:txBody>
@@ -8965,7 +8965,7 @@
                 </a:solidFill>
                 <a:latin typeface="Arial"/>
               </a:rPr>
-              <a:t>NAME</a:t>
+              <a:t>UTKARSH</a:t>
             </a:r>
           </a:p>
         </p:txBody>
@@ -9211,7 +9211,7 @@
                 </a:solidFill>
                 <a:latin typeface="Arial"/>
               </a:rPr>
-              <a:t>NAME</a:t>
+              <a:t>DEVANSH</a:t>
             </a:r>
           </a:p>
         </p:txBody>

--- a/docs/HackSummit-PACT.pptx
+++ b/docs/HackSummit-PACT.pptx
@@ -3399,7 +3399,7 @@
                 </a:solidFill>
                 <a:latin typeface="Arial"/>
               </a:rPr>
-              <a:t>198 + 55 tests, green on every push</a:t>
+              <a:t>200 + 55 tests, green on every push</a:t>
             </a:r>
           </a:p>
         </p:txBody>
@@ -5789,7 +5789,7 @@
                 </a:solidFill>
                 <a:latin typeface="Arial"/>
               </a:rPr>
-              <a:t>198 Python tests, 55 console tests, and the six demo beats run against the image itself on every push.</a:t>
+              <a:t>200 Python tests, 55 console tests, and the six demo beats run against the image itself on every push.</a:t>
             </a:r>
           </a:p>
         </p:txBody>
@@ -8517,7 +8517,7 @@
                 </a:solidFill>
                 <a:latin typeface="Arial"/>
               </a:rPr>
-              <a:t>Three lanes, one repository, 104 commits on main — backend, evidence and interfaces, each with its own directory and its own tests.</a:t>
+              <a:t>Three lanes, one repository, 105 commits on main — backend, evidence and interfaces, each with its own directory and its own tests.</a:t>
             </a:r>
           </a:p>
         </p:txBody>

--- a/docs/HackSummit-PACT.pptx
+++ b/docs/HackSummit-PACT.pptx
@@ -3399,7 +3399,7 @@
                 </a:solidFill>
                 <a:latin typeface="Arial"/>
               </a:rPr>
-              <a:t>200 + 55 tests, green on every push</a:t>
+              <a:t>204 + 55 tests, green on every push</a:t>
             </a:r>
           </a:p>
         </p:txBody>
@@ -5789,7 +5789,7 @@
                 </a:solidFill>
                 <a:latin typeface="Arial"/>
               </a:rPr>
-              <a:t>200 Python tests, 55 console tests, and the six demo beats run against the image itself on every push.</a:t>
+              <a:t>204 Python tests, 55 console tests, and the six demo beats run against the image itself on every push.</a:t>
             </a:r>
           </a:p>
         </p:txBody>
@@ -8517,7 +8517,7 @@
                 </a:solidFill>
                 <a:latin typeface="Arial"/>
               </a:rPr>
-              <a:t>Three lanes, one repository, 105 commits on main — backend, evidence and interfaces, each with its own directory and its own tests.</a:t>
+              <a:t>Three lanes, one repository, 106 commits on main — backend, evidence and interfaces, each with its own directory and its own tests.</a:t>
             </a:r>
           </a:p>
         </p:txBody>

--- a/docs/HackSummit-PACT.pptx
+++ b/docs/HackSummit-PACT.pptx
@@ -3399,7 +3399,7 @@
                 </a:solidFill>
                 <a:latin typeface="Arial"/>
               </a:rPr>
-              <a:t>204 + 55 tests, green on every push</a:t>
+              <a:t>206 + 55 tests, green on every push</a:t>
             </a:r>
           </a:p>
         </p:txBody>
@@ -5789,7 +5789,7 @@
                 </a:solidFill>
                 <a:latin typeface="Arial"/>
               </a:rPr>
-              <a:t>204 Python tests, 55 console tests, and the six demo beats run against the image itself on every push.</a:t>
+              <a:t>206 Python tests, 55 console tests, and the six demo beats run against the image itself on every push.</a:t>
             </a:r>
           </a:p>
         </p:txBody>
@@ -8517,7 +8517,7 @@
                 </a:solidFill>
                 <a:latin typeface="Arial"/>
               </a:rPr>
-              <a:t>Three lanes, one repository, 106 commits on main — backend, evidence and interfaces, each with its own directory and its own tests.</a:t>
+              <a:t>Three lanes, one repository, 107 commits on main — backend, evidence and interfaces, each with its own directory and its own tests.</a:t>
             </a:r>
           </a:p>
         </p:txBody>

--- a/docs/HackSummit-PACT.pptx
+++ b/docs/HackSummit-PACT.pptx
@@ -3399,7 +3399,7 @@
                 </a:solidFill>
                 <a:latin typeface="Arial"/>
               </a:rPr>
-              <a:t>206 + 55 tests, green on every push</a:t>
+              <a:t>213 + 55 tests, green on every push</a:t>
             </a:r>
           </a:p>
         </p:txBody>
@@ -5789,7 +5789,7 @@
                 </a:solidFill>
                 <a:latin typeface="Arial"/>
               </a:rPr>
-              <a:t>206 Python tests, 55 console tests, and the six demo beats run against the image itself on every push.</a:t>
+              <a:t>213 Python tests, 55 console tests, and the six demo beats run against the image itself on every push.</a:t>
             </a:r>
           </a:p>
         </p:txBody>
@@ -8517,7 +8517,7 @@
                 </a:solidFill>
                 <a:latin typeface="Arial"/>
               </a:rPr>
-              <a:t>Three lanes, one repository, 107 commits on main — backend, evidence and interfaces, each with its own directory and its own tests.</a:t>
+              <a:t>Three lanes, one repository, 108 commits on main — backend, evidence and interfaces, each with its own directory and its own tests.</a:t>
             </a:r>
           </a:p>
         </p:txBody>

--- a/docs/HackSummit-PACT.pptx
+++ b/docs/HackSummit-PACT.pptx
@@ -3399,7 +3399,7 @@
                 </a:solidFill>
                 <a:latin typeface="Arial"/>
               </a:rPr>
-              <a:t>213 + 55 tests, green on every push</a:t>
+              <a:t>214 + 55 tests, green on every push</a:t>
             </a:r>
           </a:p>
         </p:txBody>
@@ -5789,7 +5789,7 @@
                 </a:solidFill>
                 <a:latin typeface="Arial"/>
               </a:rPr>
-              <a:t>213 Python tests, 55 console tests, and the six demo beats run against the image itself on every push.</a:t>
+              <a:t>214 Python tests, 55 console tests, and the six demo beats run against the image itself on every push.</a:t>
             </a:r>
           </a:p>
         </p:txBody>
@@ -8517,7 +8517,7 @@
                 </a:solidFill>
                 <a:latin typeface="Arial"/>
               </a:rPr>
-              <a:t>Three lanes, one repository, 108 commits on main — backend, evidence and interfaces, each with its own directory and its own tests.</a:t>
+              <a:t>Three lanes, one repository, 112 commits on main — backend, evidence and interfaces, each with its own directory and its own tests.</a:t>
             </a:r>
           </a:p>
         </p:txBody>
